--- a/presentation/output/DNHacks_2026_DN_Research_FINAL.pptx
+++ b/presentation/output/DNHacks_2026_DN_Research_FINAL.pptx
@@ -1424,7 +1424,7 @@
           </a:p>
           <a:p>
             <a:r>
-              <a:t>Here is how we test whether the aim is real rather than plausible. We freeze the literature at a dated boundary and run the ordinary loop against the past. Everything the agent can touch predates the cutoff, retrieval is scoped and logged so an out-of-boundary read shows up in the audit, and the matching later paper is held outside the evidence store entirely. One GPU fit sits inside the boundary and is then frozen; everything downstream is cheap and replayable on CPU, which is what makes rerunning the backtest affordable. And the honest caveat, said out loud: a frozen corpus bounds the evidence, never what a pretrained model already knew.</a:t>
+              <a:t>Here is how we test whether the aim is real rather than plausible. We froze a literature corpus at the end of 2025, dating every paper by its earliest record so that no late preprint slips in, and we froze the dependency data at a December 2024 release. The finding we were hunting for was verified absent from the corpus: no pre-2026 paper connects that gene to the centriole. Then two controls on what the model itself could know. The bare model, with no corpus and no tools, will not confirm the role, while the same harness recalls a pre-cutoff control finding perfectly. And the goal we gave the agent named a structural region, never a gene. A frozen corpus bounds the evidence and never the pretraining, which is exactly why the ablation is on the slide rather than in a footnote.</a:t>
             </a:r>
           </a:p>
           <a:p/>
@@ -1435,7 +1435,7 @@
           </a:p>
           <a:p>
             <a:r>
-              <a:t>Curated PDAC collection of 100 full-text papers with an inclusive 2026-01-25 curation boundary and a self-hashing manifest. The encoder fit is the recorded L40S run. This is a controlled recovery test; post-cutoff registration and held-out cohorts are the next test.</a:t>
+              <a:t>Corpus and freeze from MANIFEST.json: target AKIP1 to centriole inner scaffold, freeze 2025-12-31, 160 papers, 3,493 claims, 45 reference seeds; the write-up quotes 3,478 claims for the same build, so cite the manifest. DepMap 24Q4, 1,178 lines by 17,916 genes. Recall ablations: ablation_akip1_recall.py returns recalled: no; ablation_gametolog_recall.py returns recalled: yes on a pre-cutoff finding. The tier-2 external novelty and date check was OFF in this pass.</a:t>
             </a:r>
           </a:p>
           <a:p/>
@@ -1446,7 +1446,7 @@
           </a:p>
           <a:p>
             <a:r>
-              <a:t>Fill the run ID, corpus hash and audit counts from the audited backtest run before presenting.</a:t>
+              <a:t>Rerun the tier-2 novelty check and record it beside the ablations before presenting to a technical judge.</a:t>
             </a:r>
           </a:p>
           <a:p/>
@@ -1543,12 +1543,12 @@
           <a:lstStyle/>
           <a:p>
             <a:r>
-              <a:t>TENTATIVE SCRIPT · 35 seconds</a:t>
-            </a:r>
-          </a:p>
-          <a:p>
-            <a:r>
-              <a:t>Of the candidates proposed inside the boundary, this many survived the soundness floor and this many reached a person at the gate. Here is one. The paper on the right was published after our cutoff by a group that never saw our system, and it was held outside the evidence store for the whole run. The claim we are making is narrow and worth stating precisely: not that the engine knew the future, but that the graph plus the floor pointed compute at a question real science went on to answer.</a:t>
+              <a:t>TENTATIVE SCRIPT · 45 seconds</a:t>
+            </a:r>
+          </a:p>
+          <a:p>
+            <a:r>
+              <a:t>From that frozen evidence the engine ran eighty-three experiments and submitted two. Both passed the soundness floor. One of them was wrong, and I want to give you that one first: FNTB scored on mean correlation against a loose centrosome set, passed the falsifier, and was killed by a manual rank-based audit at zero of twenty-five partners. That is a real gap, and it is the one we are fixing next: the floor validates the statistic the agent reports, it does not re-derive the enrichment. The surviving candidate is AKIP1, a gene the literature annotates for signalling, proposed as a structural component of the centriole inner scaffold. Three of six seed genes sit in its top twenty-five co-essential partners at an empirical p of six-point-seven times ten to the minus four, and it held when we widened the seed set and tightened the cutoff. A deterministic cross-check outside the engine puts it first of roughly seventeen thousand nine hundred genes. The preprint on the right was published in June 2026, after our corpus freeze and after the reasoning model’s own cutoff. Sound numbers are not truth, and no person has reviewed this at the gate yet. What it shows is aim.</a:t>
             </a:r>
           </a:p>
           <a:p/>
@@ -1559,7 +1559,7 @@
           </a:p>
           <a:p>
             <a:r>
-              <a:t>Every count on this slide must come from the audited run record before it is shown. Placeholder values are labelled as such on the slide itself. A frozen corpus does not exclude pretraining memory.</a:t>
+              <a:t>All figures from AKIP1_rediscovery_result.json, MANIFEST.json and WRITEUP.md in the akip1 corpus directory: effect 3 of 6 seeds, effect_size 358.32, p_null 6.664e-4, n_units 1178, robust true, explore_entry 61, run akip1main. Target DOI 10.64898/2026.06.03.729831, preprint 2026-06-07. Deterministic check against a 10-gene inner-scaffold set: rank 1 of ~17,900, 4 of 25, p 6.2e-10. Known gaps, all stated on the slide or in the write-up: the falsifier does not re-derive rank-based enrichment, the tier-2 novelty check was off, the promotion gate and human review did not run, and the exclusion list of known centriole genes was leaky, so the engine repeatedly resurfaced genuine centriole genes before the final phase.</a:t>
             </a:r>
           </a:p>
           <a:p/>
@@ -1570,7 +1570,7 @@
           </a:p>
           <a:p>
             <a:r>
-              <a:t>Replace the placeholders with the audited run: run ID, action index, branch, reviewer name and the paper DOI.</a:t>
+              <a:t>Run the human gate on this candidate and record the reviewer note, then update the fourth count.</a:t>
             </a:r>
           </a:p>
           <a:p/>
@@ -1581,7 +1581,7 @@
           </a:p>
           <a:p>
             <a:r>
-              <a:t>Reliability, Evaluation &amp; Trustworthiness (25); Technical Execution (50)</a:t>
+              <a:t>Reliability, Evaluation &amp; Trustworthiness (25); Technical Execution (50); Novelty and Importance of AI (25)</a:t>
             </a:r>
           </a:p>
           <a:p/>
@@ -1597,7 +1597,7 @@
           </a:p>
           <a:p>
             <a:r>
-              <a:t>Repository: demo/pdac/README.md at fee316580ba27951c2ad6fea4bdd4a6b335421ed</a:t>
+              <a:t>Repository: skills/co_essentiality/SKILL.md at fee316580ba27951c2ad6fea4bdd4a6b335421ed</a:t>
             </a:r>
           </a:p>
         </p:txBody>
@@ -39268,7 +39268,7 @@
                 </a:solidFill>
                 <a:latin typeface="IBM Plex Sans"/>
               </a:rPr>
-              <a:t>The only honest way to ask whether the aim is real: give it what was known, and see whether it reaches what came next.</a:t>
+              <a:t>The only honest way to ask whether the aim is real: give it what was known in 2025, and see whether it reaches what was published in 2026.</a:t>
             </a:r>
           </a:p>
         </p:txBody>
@@ -39349,7 +39349,7 @@
                 </a:solidFill>
                 <a:latin typeface="IBM Plex Sans"/>
               </a:rPr>
-              <a:t>Corpus frozen at a dated boundary</a:t>
+              <a:t>Literature frozen at 31 December 2025</a:t>
             </a:r>
           </a:p>
         </p:txBody>
@@ -39363,7 +39363,7 @@
         <p:spPr>
           <a:xfrm>
             <a:off x="566928" y="3232404"/>
-            <a:ext cx="5358384" cy="434848"/>
+            <a:ext cx="5358384" cy="633984"/>
           </a:xfrm>
           <a:prstGeom prst="rect">
             <a:avLst/>
@@ -39394,7 +39394,7 @@
                 </a:solidFill>
                 <a:latin typeface="IBM Plex Sans"/>
               </a:rPr>
-              <a:t>Every paper, dataset and claim the agent can touch predates it. Corpus and data hashes are recorded with the run ID.</a:t>
+              <a:t>160 open-access papers, 3,493 claims. Every paper dated by its earliest Europe PMC or preprint record, so a late preprint cannot slip in.</a:t>
             </a:r>
           </a:p>
         </p:txBody>
@@ -39407,7 +39407,7 @@
         </p:nvCxnSpPr>
         <p:spPr>
           <a:xfrm>
-            <a:off x="566928" y="3868420"/>
+            <a:off x="566928" y="4067556"/>
             <a:ext cx="5358384" cy="0"/>
           </a:xfrm>
           <a:prstGeom prst="line">
@@ -39443,7 +39443,7 @@
         </p:nvSpPr>
         <p:spPr>
           <a:xfrm>
-            <a:off x="566928" y="3978148"/>
+            <a:off x="566928" y="4177284"/>
             <a:ext cx="5358384" cy="310896"/>
           </a:xfrm>
           <a:prstGeom prst="rect">
@@ -39475,7 +39475,7 @@
                 </a:solidFill>
                 <a:latin typeface="IBM Plex Sans"/>
               </a:rPr>
-              <a:t>Retrieval is scoped and logged</a:t>
+              <a:t>The data is frozen too</a:t>
             </a:r>
           </a:p>
         </p:txBody>
@@ -39488,8 +39488,8 @@
         </p:nvSpPr>
         <p:spPr>
           <a:xfrm>
-            <a:off x="566928" y="4266184"/>
-            <a:ext cx="5358384" cy="434848"/>
+            <a:off x="566928" y="4465320"/>
+            <a:ext cx="5358384" cy="633984"/>
           </a:xfrm>
           <a:prstGeom prst="rect">
             <a:avLst/>
@@ -39520,7 +39520,7 @@
                 </a:solidFill>
                 <a:latin typeface="IBM Plex Sans"/>
               </a:rPr>
-              <a:t>Tool calls are recorded with their scope, so an out-of-boundary read appears in the audit instead of disappearing.</a:t>
+              <a:t>DepMap 24Q4 gene-effect matrix, 1,178 cell lines by 17,916 genes, released December 2024, before the target preprint existed.</a:t>
             </a:r>
           </a:p>
         </p:txBody>
@@ -39533,7 +39533,7 @@
         </p:nvCxnSpPr>
         <p:spPr>
           <a:xfrm>
-            <a:off x="566928" y="4902200"/>
+            <a:off x="566928" y="5300471"/>
             <a:ext cx="5358384" cy="0"/>
           </a:xfrm>
           <a:prstGeom prst="line">
@@ -39569,7 +39569,7 @@
         </p:nvSpPr>
         <p:spPr>
           <a:xfrm>
-            <a:off x="566928" y="5011928"/>
+            <a:off x="566928" y="5410199"/>
             <a:ext cx="5358384" cy="310896"/>
           </a:xfrm>
           <a:prstGeom prst="rect">
@@ -39601,7 +39601,7 @@
                 </a:solidFill>
                 <a:latin typeface="IBM Plex Sans"/>
               </a:rPr>
-              <a:t>The matching paper is withheld</a:t>
+              <a:t>The answer is absent, not hidden</a:t>
             </a:r>
           </a:p>
         </p:txBody>
@@ -39614,7 +39614,7 @@
         </p:nvSpPr>
         <p:spPr>
           <a:xfrm>
-            <a:off x="566928" y="5299963"/>
+            <a:off x="566928" y="5698235"/>
             <a:ext cx="5358384" cy="434848"/>
           </a:xfrm>
           <a:prstGeom prst="rect">
@@ -39646,111 +39646,21 @@
                 </a:solidFill>
                 <a:latin typeface="IBM Plex Sans"/>
               </a:rPr>
-              <a:t>Held outside the evidence store entirely, not merely down-ranked.</a:t>
-            </a:r>
-          </a:p>
-        </p:txBody>
-      </p:sp>
-      <p:sp>
-        <p:nvSpPr>
-          <p:cNvPr id="19" name="TextBox 18"/>
-          <p:cNvSpPr txBox="1"/>
-          <p:nvPr/>
-        </p:nvSpPr>
-        <p:spPr>
-          <a:xfrm>
-            <a:off x="566928" y="5650992"/>
-            <a:ext cx="5486400" cy="237744"/>
-          </a:xfrm>
-          <a:prstGeom prst="rect">
-            <a:avLst/>
-          </a:prstGeom>
-          <a:noFill/>
-        </p:spPr>
-        <p:txBody>
-          <a:bodyPr wrap="square" lIns="0" rIns="0" tIns="0" bIns="0" anchor="t">
-            <a:noAutofit/>
-          </a:bodyPr>
-          <a:lstStyle/>
-          <a:p>
-            <a:pPr algn="l">
-              <a:lnSpc>
-                <a:spcPct val="108000"/>
-              </a:lnSpc>
-              <a:spcBef>
-                <a:spcPts val="0"/>
-              </a:spcBef>
-              <a:spcAft>
-                <a:spcPts val="0"/>
-              </a:spcAft>
-            </a:pPr>
-            <a:r>
-              <a:rPr sz="1050" b="1">
-                <a:solidFill>
-                  <a:srgbClr val="A6C9B8"/>
-                </a:solidFill>
-                <a:latin typeface="IBM Plex Mono"/>
-              </a:rPr>
-              <a:t>THE COLLECTION, AS FROZEN</a:t>
-            </a:r>
-          </a:p>
-        </p:txBody>
-      </p:sp>
-      <p:sp>
-        <p:nvSpPr>
-          <p:cNvPr id="20" name="TextBox 19"/>
-          <p:cNvSpPr txBox="1"/>
-          <p:nvPr/>
-        </p:nvSpPr>
-        <p:spPr>
-          <a:xfrm>
-            <a:off x="566928" y="5907024"/>
-            <a:ext cx="5577840" cy="457200"/>
-          </a:xfrm>
-          <a:prstGeom prst="rect">
-            <a:avLst/>
-          </a:prstGeom>
-          <a:noFill/>
-        </p:spPr>
-        <p:txBody>
-          <a:bodyPr wrap="square" lIns="0" rIns="0" tIns="0" bIns="0" anchor="t">
-            <a:noAutofit/>
-          </a:bodyPr>
-          <a:lstStyle/>
-          <a:p>
-            <a:pPr algn="l">
-              <a:lnSpc>
-                <a:spcPct val="108000"/>
-              </a:lnSpc>
-              <a:spcBef>
-                <a:spcPts val="0"/>
-              </a:spcBef>
-              <a:spcAft>
-                <a:spcPts val="0"/>
-              </a:spcAft>
-            </a:pPr>
-            <a:r>
-              <a:rPr sz="1200" b="0">
-                <a:solidFill>
-                  <a:srgbClr val="AFB9B2"/>
-                </a:solidFill>
-                <a:latin typeface="IBM Plex Sans"/>
-              </a:rPr>
-              <a:t>100 open-access papers, 2007–2025 · boundary 2026-01-25 · 7,212,281 characters · 89 JATS XML, 11 HTML · SHA-256 per file and manifest.</a:t>
-            </a:r>
-          </a:p>
-        </p:txBody>
-      </p:sp>
-      <p:sp>
-        <p:nvSpPr>
-          <p:cNvPr id="21" name="Rectangle 20"/>
+              <a:t>No pre-2026 paper links the gene to the centriole. It was verified absent, not down-ranked.</a:t>
+            </a:r>
+          </a:p>
+        </p:txBody>
+      </p:sp>
+      <p:sp>
+        <p:nvSpPr>
+          <p:cNvPr id="19" name="Rectangle 18"/>
           <p:cNvSpPr/>
           <p:nvPr/>
         </p:nvSpPr>
         <p:spPr>
           <a:xfrm>
-            <a:off x="6364224" y="2889504"/>
-            <a:ext cx="5285232" cy="2560320"/>
+            <a:off x="6364224" y="2834640"/>
+            <a:ext cx="5285232" cy="2633472"/>
           </a:xfrm>
           <a:prstGeom prst="rect">
             <a:avLst/>
@@ -39789,13 +39699,13 @@
       </p:sp>
       <p:sp>
         <p:nvSpPr>
-          <p:cNvPr id="22" name="TextBox 21"/>
+          <p:cNvPr id="20" name="TextBox 19"/>
           <p:cNvSpPr txBox="1"/>
           <p:nvPr/>
         </p:nvSpPr>
         <p:spPr>
           <a:xfrm>
-            <a:off x="6601968" y="3035808"/>
+            <a:off x="6601968" y="2999232"/>
             <a:ext cx="4754880" cy="237744"/>
           </a:xfrm>
           <a:prstGeom prst="rect">
@@ -39827,20 +39737,20 @@
                 </a:solidFill>
                 <a:latin typeface="IBM Plex Mono"/>
               </a:rPr>
-              <a:t>WHERE THE GPU GOES</a:t>
-            </a:r>
-          </a:p>
-        </p:txBody>
-      </p:sp>
-      <p:sp>
-        <p:nvSpPr>
-          <p:cNvPr id="23" name="TextBox 22"/>
+              <a:t>TWO CONTROLS ON WHAT IT COULD KNOW</a:t>
+            </a:r>
+          </a:p>
+        </p:txBody>
+      </p:sp>
+      <p:sp>
+        <p:nvSpPr>
+          <p:cNvPr id="21" name="TextBox 20"/>
           <p:cNvSpPr txBox="1"/>
           <p:nvPr/>
         </p:nvSpPr>
         <p:spPr>
           <a:xfrm>
-            <a:off x="6601968" y="3310128"/>
+            <a:off x="6601968" y="3273552"/>
             <a:ext cx="4846320" cy="402336"/>
           </a:xfrm>
           <a:prstGeom prst="rect">
@@ -39872,21 +39782,21 @@
                 </a:solidFill>
                 <a:latin typeface="IBM Plex Sans"/>
               </a:rPr>
-              <a:t>ONE NVIDIA L40S · 3.41s FIT</a:t>
-            </a:r>
-          </a:p>
-        </p:txBody>
-      </p:sp>
-      <p:sp>
-        <p:nvSpPr>
-          <p:cNvPr id="24" name="TextBox 23"/>
+              <a:t>RECALLED: NO</a:t>
+            </a:r>
+          </a:p>
+        </p:txBody>
+      </p:sp>
+      <p:sp>
+        <p:nvSpPr>
+          <p:cNvPr id="22" name="TextBox 21"/>
           <p:cNvSpPr txBox="1"/>
           <p:nvPr/>
         </p:nvSpPr>
         <p:spPr>
           <a:xfrm>
-            <a:off x="6601968" y="3803904"/>
-            <a:ext cx="4791456" cy="731520"/>
+            <a:off x="6601968" y="3730752"/>
+            <a:ext cx="4791456" cy="822960"/>
           </a:xfrm>
           <a:prstGeom prst="rect">
             <a:avLst/>
@@ -39917,21 +39827,21 @@
                 </a:solidFill>
                 <a:latin typeface="IBM Plex Sans"/>
               </a:rPr>
-              <a:t>19,000 → 512 → 128 masked encoder · 15% masking · 100 epochs · float32 · fixed seed. The only training run inside the loop.</a:t>
-            </a:r>
-          </a:p>
-        </p:txBody>
-      </p:sp>
-      <p:sp>
-        <p:nvSpPr>
-          <p:cNvPr id="25" name="TextBox 24"/>
+              <a:t>The bare model, no corpus and no tools, describes the gene only through PKA and NF-κB signalling and will not confirm a centriole role. The same harness recalls a pre-cutoff control finding.</a:t>
+            </a:r>
+          </a:p>
+        </p:txBody>
+      </p:sp>
+      <p:sp>
+        <p:nvSpPr>
+          <p:cNvPr id="23" name="TextBox 22"/>
           <p:cNvSpPr txBox="1"/>
           <p:nvPr/>
         </p:nvSpPr>
         <p:spPr>
           <a:xfrm>
-            <a:off x="6601968" y="4590288"/>
-            <a:ext cx="4791456" cy="822960"/>
+            <a:off x="6601968" y="4700016"/>
+            <a:ext cx="4791456" cy="640080"/>
           </a:xfrm>
           <a:prstGeom prst="rect">
             <a:avLst/>
@@ -39962,21 +39872,21 @@
                 </a:solidFill>
                 <a:latin typeface="IBM Plex Sans"/>
               </a:rPr>
-              <a:t>Trained once behind the boundary, then frozen. The bettor, the permutation calibration and the null audit are cheap and replayable on CPU, so a candidate costs logged actions rather than a new model.</a:t>
-            </a:r>
-          </a:p>
-        </p:txBody>
-      </p:sp>
-      <p:sp>
-        <p:nvSpPr>
-          <p:cNvPr id="26" name="TextBox 25"/>
+              <a:t>And the goal named a region, never a gene: find a gene annotated for an unrelated role whose partners are enriched in the inner scaffold.</a:t>
+            </a:r>
+          </a:p>
+        </p:txBody>
+      </p:sp>
+      <p:sp>
+        <p:nvSpPr>
+          <p:cNvPr id="24" name="TextBox 23"/>
           <p:cNvSpPr txBox="1"/>
           <p:nvPr/>
         </p:nvSpPr>
         <p:spPr>
           <a:xfrm>
-            <a:off x="6455664" y="5614416"/>
-            <a:ext cx="5120640" cy="548640"/>
+            <a:off x="6455664" y="5669280"/>
+            <a:ext cx="5120640" cy="457200"/>
           </a:xfrm>
           <a:prstGeom prst="rect">
             <a:avLst/>
@@ -40001,13 +39911,13 @@
               </a:spcAft>
             </a:pPr>
             <a:r>
-              <a:rPr sz="1350" b="0">
+              <a:rPr sz="1300" b="0">
                 <a:solidFill>
                   <a:srgbClr val="DEB577"/>
                 </a:solidFill>
                 <a:latin typeface="IBM Plex Sans"/>
               </a:rPr>
-              <a:t>A frozen corpus bounds the evidence, never what a pretrained model already knew. This is a controlled recovery test; post-cutoff registration is the next one.</a:t>
+              <a:t>A frozen corpus bounds the evidence, never what a pretrained model already knew. That is why the recall ablation is on this slide.</a:t>
             </a:r>
           </a:p>
         </p:txBody>
@@ -40324,13 +40234,13 @@
               </a:spcAft>
             </a:pPr>
             <a:r>
-              <a:rPr sz="3200" b="1">
+              <a:rPr sz="3000" b="1">
                 <a:solidFill>
                   <a:srgbClr val="F1EFE7"/>
                 </a:solidFill>
                 <a:latin typeface="IBM Plex Sans"/>
               </a:rPr>
-              <a:t>A candidate the frozen corpus could not have told it.</a:t>
+              <a:t>It proposed a centriole component the corpus did not contain.</a:t>
             </a:r>
           </a:p>
         </p:txBody>
@@ -40343,8 +40253,8 @@
         </p:nvSpPr>
         <p:spPr>
           <a:xfrm>
-            <a:off x="566928" y="1828800"/>
-            <a:ext cx="2651760" cy="768096"/>
+            <a:off x="566928" y="1773936"/>
+            <a:ext cx="2651760" cy="731520"/>
           </a:xfrm>
           <a:prstGeom prst="rect">
             <a:avLst/>
@@ -40369,13 +40279,13 @@
               </a:spcAft>
             </a:pPr>
             <a:r>
-              <a:rPr sz="3800" b="1">
+              <a:rPr sz="3600" b="1">
                 <a:solidFill>
                   <a:srgbClr val="A6C9B8"/>
                 </a:solidFill>
                 <a:latin typeface="IBM Plex Sans"/>
               </a:rPr>
-              <a:t>[ X ]</a:t>
+              <a:t>83</a:t>
             </a:r>
           </a:p>
         </p:txBody>
@@ -40388,8 +40298,8 @@
         </p:nvSpPr>
         <p:spPr>
           <a:xfrm>
-            <a:off x="566928" y="2633472"/>
-            <a:ext cx="2688336" cy="438912"/>
+            <a:off x="566928" y="2542032"/>
+            <a:ext cx="2688336" cy="420624"/>
           </a:xfrm>
           <a:prstGeom prst="rect">
             <a:avLst/>
@@ -40414,13 +40324,13 @@
               </a:spcAft>
             </a:pPr>
             <a:r>
-              <a:rPr sz="1500" b="0">
+              <a:rPr sz="1450" b="0">
                 <a:solidFill>
                   <a:srgbClr val="AFB9B2"/>
                 </a:solidFill>
                 <a:latin typeface="IBM Plex Sans"/>
               </a:rPr>
-              <a:t>candidates proposed</a:t>
+              <a:t>experiments run</a:t>
             </a:r>
           </a:p>
         </p:txBody>
@@ -40433,8 +40343,8 @@
         </p:nvSpPr>
         <p:spPr>
           <a:xfrm>
-            <a:off x="3392424" y="1828800"/>
-            <a:ext cx="2651760" cy="768096"/>
+            <a:off x="3392424" y="1773936"/>
+            <a:ext cx="2651760" cy="731520"/>
           </a:xfrm>
           <a:prstGeom prst="rect">
             <a:avLst/>
@@ -40459,13 +40369,13 @@
               </a:spcAft>
             </a:pPr>
             <a:r>
-              <a:rPr sz="3800" b="1">
+              <a:rPr sz="3600" b="1">
                 <a:solidFill>
                   <a:srgbClr val="A6C9B8"/>
                 </a:solidFill>
                 <a:latin typeface="IBM Plex Sans"/>
               </a:rPr>
-              <a:t>[ X ]</a:t>
+              <a:t>2</a:t>
             </a:r>
           </a:p>
         </p:txBody>
@@ -40478,8 +40388,8 @@
         </p:nvSpPr>
         <p:spPr>
           <a:xfrm>
-            <a:off x="3392424" y="2633472"/>
-            <a:ext cx="2688336" cy="438912"/>
+            <a:off x="3392424" y="2542032"/>
+            <a:ext cx="2688336" cy="420624"/>
           </a:xfrm>
           <a:prstGeom prst="rect">
             <a:avLst/>
@@ -40504,7 +40414,97 @@
               </a:spcAft>
             </a:pPr>
             <a:r>
-              <a:rPr sz="1500" b="0">
+              <a:rPr sz="1450" b="0">
+                <a:solidFill>
+                  <a:srgbClr val="AFB9B2"/>
+                </a:solidFill>
+                <a:latin typeface="IBM Plex Sans"/>
+              </a:rPr>
+              <a:t>submitted to verification</a:t>
+            </a:r>
+          </a:p>
+        </p:txBody>
+      </p:sp>
+      <p:sp>
+        <p:nvSpPr>
+          <p:cNvPr id="13" name="TextBox 12"/>
+          <p:cNvSpPr txBox="1"/>
+          <p:nvPr/>
+        </p:nvSpPr>
+        <p:spPr>
+          <a:xfrm>
+            <a:off x="6217920" y="1773936"/>
+            <a:ext cx="2651760" cy="731520"/>
+          </a:xfrm>
+          <a:prstGeom prst="rect">
+            <a:avLst/>
+          </a:prstGeom>
+          <a:noFill/>
+        </p:spPr>
+        <p:txBody>
+          <a:bodyPr wrap="square" lIns="0" rIns="0" tIns="0" bIns="0" anchor="t">
+            <a:noAutofit/>
+          </a:bodyPr>
+          <a:lstStyle/>
+          <a:p>
+            <a:pPr algn="l">
+              <a:lnSpc>
+                <a:spcPct val="108000"/>
+              </a:lnSpc>
+              <a:spcBef>
+                <a:spcPts val="0"/>
+              </a:spcBef>
+              <a:spcAft>
+                <a:spcPts val="0"/>
+              </a:spcAft>
+            </a:pPr>
+            <a:r>
+              <a:rPr sz="3600" b="1">
+                <a:solidFill>
+                  <a:srgbClr val="A6C9B8"/>
+                </a:solidFill>
+                <a:latin typeface="IBM Plex Sans"/>
+              </a:rPr>
+              <a:t>2</a:t>
+            </a:r>
+          </a:p>
+        </p:txBody>
+      </p:sp>
+      <p:sp>
+        <p:nvSpPr>
+          <p:cNvPr id="14" name="TextBox 13"/>
+          <p:cNvSpPr txBox="1"/>
+          <p:nvPr/>
+        </p:nvSpPr>
+        <p:spPr>
+          <a:xfrm>
+            <a:off x="6217920" y="2542032"/>
+            <a:ext cx="2688336" cy="420624"/>
+          </a:xfrm>
+          <a:prstGeom prst="rect">
+            <a:avLst/>
+          </a:prstGeom>
+          <a:noFill/>
+        </p:spPr>
+        <p:txBody>
+          <a:bodyPr wrap="square" lIns="0" rIns="0" tIns="0" bIns="0" anchor="t">
+            <a:noAutofit/>
+          </a:bodyPr>
+          <a:lstStyle/>
+          <a:p>
+            <a:pPr algn="l">
+              <a:lnSpc>
+                <a:spcPct val="108000"/>
+              </a:lnSpc>
+              <a:spcBef>
+                <a:spcPts val="0"/>
+              </a:spcBef>
+              <a:spcAft>
+                <a:spcPts val="0"/>
+              </a:spcAft>
+            </a:pPr>
+            <a:r>
+              <a:rPr sz="1450" b="0">
                 <a:solidFill>
                   <a:srgbClr val="AFB9B2"/>
                 </a:solidFill>
@@ -40517,14 +40517,14 @@
       </p:sp>
       <p:sp>
         <p:nvSpPr>
-          <p:cNvPr id="13" name="TextBox 12"/>
+          <p:cNvPr id="15" name="TextBox 14"/>
           <p:cNvSpPr txBox="1"/>
           <p:nvPr/>
         </p:nvSpPr>
         <p:spPr>
           <a:xfrm>
-            <a:off x="6217920" y="1828800"/>
-            <a:ext cx="2651760" cy="768096"/>
+            <a:off x="9043415" y="1773936"/>
+            <a:ext cx="2651760" cy="731520"/>
           </a:xfrm>
           <a:prstGeom prst="rect">
             <a:avLst/>
@@ -40549,97 +40549,7 @@
               </a:spcAft>
             </a:pPr>
             <a:r>
-              <a:rPr sz="3800" b="1">
-                <a:solidFill>
-                  <a:srgbClr val="A6C9B8"/>
-                </a:solidFill>
-                <a:latin typeface="IBM Plex Sans"/>
-              </a:rPr>
-              <a:t>[ X ]</a:t>
-            </a:r>
-          </a:p>
-        </p:txBody>
-      </p:sp>
-      <p:sp>
-        <p:nvSpPr>
-          <p:cNvPr id="14" name="TextBox 13"/>
-          <p:cNvSpPr txBox="1"/>
-          <p:nvPr/>
-        </p:nvSpPr>
-        <p:spPr>
-          <a:xfrm>
-            <a:off x="6217920" y="2633472"/>
-            <a:ext cx="2688336" cy="438912"/>
-          </a:xfrm>
-          <a:prstGeom prst="rect">
-            <a:avLst/>
-          </a:prstGeom>
-          <a:noFill/>
-        </p:spPr>
-        <p:txBody>
-          <a:bodyPr wrap="square" lIns="0" rIns="0" tIns="0" bIns="0" anchor="t">
-            <a:noAutofit/>
-          </a:bodyPr>
-          <a:lstStyle/>
-          <a:p>
-            <a:pPr algn="l">
-              <a:lnSpc>
-                <a:spcPct val="108000"/>
-              </a:lnSpc>
-              <a:spcBef>
-                <a:spcPts val="0"/>
-              </a:spcBef>
-              <a:spcAft>
-                <a:spcPts val="0"/>
-              </a:spcAft>
-            </a:pPr>
-            <a:r>
-              <a:rPr sz="1500" b="0">
-                <a:solidFill>
-                  <a:srgbClr val="AFB9B2"/>
-                </a:solidFill>
-                <a:latin typeface="IBM Plex Sans"/>
-              </a:rPr>
-              <a:t>reached the human gate</a:t>
-            </a:r>
-          </a:p>
-        </p:txBody>
-      </p:sp>
-      <p:sp>
-        <p:nvSpPr>
-          <p:cNvPr id="15" name="TextBox 14"/>
-          <p:cNvSpPr txBox="1"/>
-          <p:nvPr/>
-        </p:nvSpPr>
-        <p:spPr>
-          <a:xfrm>
-            <a:off x="9043415" y="1828800"/>
-            <a:ext cx="2651760" cy="768096"/>
-          </a:xfrm>
-          <a:prstGeom prst="rect">
-            <a:avLst/>
-          </a:prstGeom>
-          <a:noFill/>
-        </p:spPr>
-        <p:txBody>
-          <a:bodyPr wrap="square" lIns="0" rIns="0" tIns="0" bIns="0" anchor="t">
-            <a:noAutofit/>
-          </a:bodyPr>
-          <a:lstStyle/>
-          <a:p>
-            <a:pPr algn="l">
-              <a:lnSpc>
-                <a:spcPct val="108000"/>
-              </a:lnSpc>
-              <a:spcBef>
-                <a:spcPts val="0"/>
-              </a:spcBef>
-              <a:spcAft>
-                <a:spcPts val="0"/>
-              </a:spcAft>
-            </a:pPr>
-            <a:r>
-              <a:rPr sz="3800" b="1">
+              <a:rPr sz="3600" b="1">
                 <a:solidFill>
                   <a:srgbClr val="DEB577"/>
                 </a:solidFill>
@@ -40658,8 +40568,8 @@
         </p:nvSpPr>
         <p:spPr>
           <a:xfrm>
-            <a:off x="9043415" y="2633472"/>
-            <a:ext cx="2688336" cy="438912"/>
+            <a:off x="9043415" y="2542032"/>
+            <a:ext cx="2688336" cy="420624"/>
           </a:xfrm>
           <a:prstGeom prst="rect">
             <a:avLst/>
@@ -40684,13 +40594,13 @@
               </a:spcAft>
             </a:pPr>
             <a:r>
-              <a:rPr sz="1500" b="0">
+              <a:rPr sz="1450" b="0">
                 <a:solidFill>
                   <a:srgbClr val="AFB9B2"/>
                 </a:solidFill>
                 <a:latin typeface="IBM Plex Sans"/>
               </a:rPr>
-              <a:t>matched a later paper</a:t>
+              <a:t>survived the rigor audit</a:t>
             </a:r>
           </a:p>
         </p:txBody>
@@ -40703,7 +40613,7 @@
         </p:nvCxnSpPr>
         <p:spPr>
           <a:xfrm>
-            <a:off x="548640" y="3163824"/>
+            <a:off x="548640" y="3054096"/>
             <a:ext cx="11091672" cy="0"/>
           </a:xfrm>
           <a:prstGeom prst="line">
@@ -40739,7 +40649,7 @@
         </p:nvSpPr>
         <p:spPr>
           <a:xfrm>
-            <a:off x="566928" y="3291840"/>
+            <a:off x="566928" y="3182112"/>
             <a:ext cx="5394960" cy="237744"/>
           </a:xfrm>
           <a:prstGeom prst="rect">
@@ -40784,7 +40694,7 @@
         </p:nvSpPr>
         <p:spPr>
           <a:xfrm>
-            <a:off x="566928" y="3566160"/>
+            <a:off x="566928" y="3438144"/>
             <a:ext cx="5394960" cy="731520"/>
           </a:xfrm>
           <a:prstGeom prst="rect">
@@ -40810,13 +40720,13 @@
               </a:spcAft>
             </a:pPr>
             <a:r>
-              <a:rPr sz="1900" b="1">
+              <a:rPr sz="2100" b="1">
                 <a:solidFill>
                   <a:srgbClr val="F1EFE7"/>
                 </a:solidFill>
                 <a:latin typeface="IBM Plex Sans"/>
               </a:rPr>
-              <a:t>[ subject → predicate → object · aspect ]</a:t>
+              <a:t>AKIP1 is a component of the centriole inner scaffold</a:t>
             </a:r>
           </a:p>
         </p:txBody>
@@ -40829,7 +40739,52 @@
         </p:nvSpPr>
         <p:spPr>
           <a:xfrm>
-            <a:off x="566928" y="4389120"/>
+            <a:off x="566928" y="4261104"/>
+            <a:ext cx="5358384" cy="731520"/>
+          </a:xfrm>
+          <a:prstGeom prst="rect">
+            <a:avLst/>
+          </a:prstGeom>
+          <a:noFill/>
+        </p:spPr>
+        <p:txBody>
+          <a:bodyPr wrap="square" lIns="0" rIns="0" tIns="0" bIns="0" anchor="t">
+            <a:noAutofit/>
+          </a:bodyPr>
+          <a:lstStyle/>
+          <a:p>
+            <a:pPr algn="l">
+              <a:lnSpc>
+                <a:spcPct val="108000"/>
+              </a:lnSpc>
+              <a:spcBef>
+                <a:spcPts val="0"/>
+              </a:spcBef>
+              <a:spcAft>
+                <a:spcPts val="0"/>
+              </a:spcAft>
+            </a:pPr>
+            <a:r>
+              <a:rPr sz="1400" b="0">
+                <a:solidFill>
+                  <a:srgbClr val="F1EFE7"/>
+                </a:solidFill>
+                <a:latin typeface="IBM Plex Sans"/>
+              </a:rPr>
+              <a:t>3 of 6 inner-scaffold seed genes sit in its top-25 co-essential partners. Empirical p = 6.7e-4 against 3,000 random genes, 1,178 cell lines, and it held across wider seed sets and a stricter top-15 cutoff.</a:t>
+            </a:r>
+          </a:p>
+        </p:txBody>
+      </p:sp>
+      <p:sp>
+        <p:nvSpPr>
+          <p:cNvPr id="21" name="TextBox 20"/>
+          <p:cNvSpPr txBox="1"/>
+          <p:nvPr/>
+        </p:nvSpPr>
+        <p:spPr>
+          <a:xfrm>
+            <a:off x="566928" y="5230368"/>
             <a:ext cx="5394960" cy="237744"/>
           </a:xfrm>
           <a:prstGeom prst="rect">
@@ -40861,21 +40816,21 @@
                 </a:solidFill>
                 <a:latin typeface="IBM Plex Mono"/>
               </a:rPr>
-              <a:t>CHECKS PASSED</a:t>
-            </a:r>
-          </a:p>
-        </p:txBody>
-      </p:sp>
-      <p:sp>
-        <p:nvSpPr>
-          <p:cNvPr id="21" name="TextBox 20"/>
+              <a:t>DETERMINISTIC CROSS-CHECK, OUTSIDE THE ENGINE</a:t>
+            </a:r>
+          </a:p>
+        </p:txBody>
+      </p:sp>
+      <p:sp>
+        <p:nvSpPr>
+          <p:cNvPr id="22" name="TextBox 21"/>
           <p:cNvSpPr txBox="1"/>
           <p:nvPr/>
         </p:nvSpPr>
         <p:spPr>
           <a:xfrm>
-            <a:off x="566928" y="4663440"/>
-            <a:ext cx="5358384" cy="731520"/>
+            <a:off x="566928" y="5486400"/>
+            <a:ext cx="5394960" cy="310896"/>
           </a:xfrm>
           <a:prstGeom prst="rect">
             <a:avLst/>
@@ -40900,27 +40855,208 @@
               </a:spcAft>
             </a:pPr>
             <a:r>
-              <a:rPr sz="1400" b="0">
+              <a:rPr sz="1600" b="1">
+                <a:solidFill>
+                  <a:srgbClr val="A6C9B8"/>
+                </a:solidFill>
+                <a:latin typeface="IBM Plex Sans"/>
+              </a:rPr>
+              <a:t>Rank #1 of ~17,900 non-module genes · p = 6.2e-10</a:t>
+            </a:r>
+          </a:p>
+        </p:txBody>
+      </p:sp>
+      <p:sp>
+        <p:nvSpPr>
+          <p:cNvPr id="23" name="TextBox 22"/>
+          <p:cNvSpPr txBox="1"/>
+          <p:nvPr/>
+        </p:nvSpPr>
+        <p:spPr>
+          <a:xfrm>
+            <a:off x="566928" y="5815584"/>
+            <a:ext cx="5394960" cy="256032"/>
+          </a:xfrm>
+          <a:prstGeom prst="rect">
+            <a:avLst/>
+          </a:prstGeom>
+          <a:noFill/>
+        </p:spPr>
+        <p:txBody>
+          <a:bodyPr wrap="square" lIns="0" rIns="0" tIns="0" bIns="0" anchor="t">
+            <a:noAutofit/>
+          </a:bodyPr>
+          <a:lstStyle/>
+          <a:p>
+            <a:pPr algn="l">
+              <a:lnSpc>
+                <a:spcPct val="108000"/>
+              </a:lnSpc>
+              <a:spcBef>
+                <a:spcPts val="0"/>
+              </a:spcBef>
+              <a:spcAft>
+                <a:spcPts val="0"/>
+              </a:spcAft>
+            </a:pPr>
+            <a:r>
+              <a:rPr sz="1050" b="0">
+                <a:solidFill>
+                  <a:srgbClr val="AFB9B2"/>
+                </a:solidFill>
+                <a:latin typeface="IBM Plex Mono"/>
+              </a:rPr>
+              <a:t>ENTRY 61 · RUN akip1main · NO GENE NAMED IN THE GOAL</a:t>
+            </a:r>
+          </a:p>
+        </p:txBody>
+      </p:sp>
+      <p:sp>
+        <p:nvSpPr>
+          <p:cNvPr id="24" name="Rectangle 23"/>
+          <p:cNvSpPr/>
+          <p:nvPr/>
+        </p:nvSpPr>
+        <p:spPr>
+          <a:xfrm>
+            <a:off x="6364224" y="3182112"/>
+            <a:ext cx="5285232" cy="2304288"/>
+          </a:xfrm>
+          <a:prstGeom prst="rect">
+            <a:avLst/>
+          </a:prstGeom>
+          <a:solidFill>
+            <a:srgbClr val="222E2A"/>
+          </a:solidFill>
+          <a:ln w="8890">
+            <a:solidFill>
+              <a:srgbClr val="3A4944"/>
+            </a:solidFill>
+          </a:ln>
+          <a:effectLst/>
+        </p:spPr>
+        <p:style>
+          <a:lnRef idx="1">
+            <a:schemeClr val="accent1"/>
+          </a:lnRef>
+          <a:fillRef idx="3">
+            <a:schemeClr val="accent1"/>
+          </a:fillRef>
+          <a:effectRef idx="0">
+            <a:schemeClr val="accent1"/>
+          </a:effectRef>
+          <a:fontRef idx="minor">
+            <a:schemeClr val="lt1"/>
+          </a:fontRef>
+        </p:style>
+        <p:txBody>
+          <a:bodyPr rtlCol="0" anchor="ctr"/>
+          <a:lstStyle/>
+          <a:p>
+            <a:pPr algn="ctr"/>
+          </a:p>
+        </p:txBody>
+      </p:sp>
+      <p:sp>
+        <p:nvSpPr>
+          <p:cNvPr id="25" name="TextBox 24"/>
+          <p:cNvSpPr txBox="1"/>
+          <p:nvPr/>
+        </p:nvSpPr>
+        <p:spPr>
+          <a:xfrm>
+            <a:off x="6601968" y="3328416"/>
+            <a:ext cx="4791456" cy="237744"/>
+          </a:xfrm>
+          <a:prstGeom prst="rect">
+            <a:avLst/>
+          </a:prstGeom>
+          <a:noFill/>
+        </p:spPr>
+        <p:txBody>
+          <a:bodyPr wrap="square" lIns="0" rIns="0" tIns="0" bIns="0" anchor="t">
+            <a:noAutofit/>
+          </a:bodyPr>
+          <a:lstStyle/>
+          <a:p>
+            <a:pPr algn="l">
+              <a:lnSpc>
+                <a:spcPct val="108000"/>
+              </a:lnSpc>
+              <a:spcBef>
+                <a:spcPts val="0"/>
+              </a:spcBef>
+              <a:spcAft>
+                <a:spcPts val="0"/>
+              </a:spcAft>
+            </a:pPr>
+            <a:r>
+              <a:rPr sz="1050" b="1">
+                <a:solidFill>
+                  <a:srgbClr val="DEB577"/>
+                </a:solidFill>
+                <a:latin typeface="IBM Plex Mono"/>
+              </a:rPr>
+              <a:t>bioRxiv · PUBLISHED 7 JUNE 2026</a:t>
+            </a:r>
+          </a:p>
+        </p:txBody>
+      </p:sp>
+      <p:sp>
+        <p:nvSpPr>
+          <p:cNvPr id="26" name="TextBox 25"/>
+          <p:cNvSpPr txBox="1"/>
+          <p:nvPr/>
+        </p:nvSpPr>
+        <p:spPr>
+          <a:xfrm>
+            <a:off x="6601968" y="3602736"/>
+            <a:ext cx="4791456" cy="731520"/>
+          </a:xfrm>
+          <a:prstGeom prst="rect">
+            <a:avLst/>
+          </a:prstGeom>
+          <a:noFill/>
+        </p:spPr>
+        <p:txBody>
+          <a:bodyPr wrap="square" lIns="0" rIns="0" tIns="0" bIns="0" anchor="t">
+            <a:noAutofit/>
+          </a:bodyPr>
+          <a:lstStyle/>
+          <a:p>
+            <a:pPr algn="l">
+              <a:lnSpc>
+                <a:spcPct val="108000"/>
+              </a:lnSpc>
+              <a:spcBef>
+                <a:spcPts val="0"/>
+              </a:spcBef>
+              <a:spcAft>
+                <a:spcPts val="0"/>
+              </a:spcAft>
+            </a:pPr>
+            <a:r>
+              <a:rPr sz="1700" b="1">
                 <a:solidFill>
                   <a:srgbClr val="F1EFE7"/>
                 </a:solidFill>
                 <a:latin typeface="IBM Plex Sans"/>
               </a:rPr>
-              <a:t>≥8 independent units · permutation p never exactly zero · direction declared before the result · leave-one-group-out held</a:t>
-            </a:r>
-          </a:p>
-        </p:txBody>
-      </p:sp>
-      <p:sp>
-        <p:nvSpPr>
-          <p:cNvPr id="22" name="TextBox 21"/>
+              <a:t>AKIP1 is an inner scaffold component required for centriole integrity</a:t>
+            </a:r>
+          </a:p>
+        </p:txBody>
+      </p:sp>
+      <p:sp>
+        <p:nvSpPr>
+          <p:cNvPr id="27" name="TextBox 26"/>
           <p:cNvSpPr txBox="1"/>
           <p:nvPr/>
         </p:nvSpPr>
         <p:spPr>
           <a:xfrm>
-            <a:off x="566928" y="5394960"/>
-            <a:ext cx="5394960" cy="457200"/>
+            <a:off x="6601968" y="4443984"/>
+            <a:ext cx="4791456" cy="274320"/>
           </a:xfrm>
           <a:prstGeom prst="rect">
             <a:avLst/>
@@ -40951,67 +41087,21 @@
                 </a:solidFill>
                 <a:latin typeface="IBM Plex Mono"/>
               </a:rPr>
-              <a:t>PROPOSED AT ACTION [ X ] OF [ X ] · BRANCH [ X ] · ACCEPTED BY [ NAME ]</a:t>
-            </a:r>
-          </a:p>
-        </p:txBody>
-      </p:sp>
-      <p:sp>
-        <p:nvSpPr>
-          <p:cNvPr id="23" name="Rectangle 22"/>
-          <p:cNvSpPr/>
-          <p:nvPr/>
-        </p:nvSpPr>
-        <p:spPr>
-          <a:xfrm>
-            <a:off x="6364224" y="3291840"/>
-            <a:ext cx="5285232" cy="2377440"/>
-          </a:xfrm>
-          <a:prstGeom prst="rect">
-            <a:avLst/>
-          </a:prstGeom>
-          <a:solidFill>
-            <a:srgbClr val="222E2A"/>
-          </a:solidFill>
-          <a:ln w="8890">
-            <a:solidFill>
-              <a:srgbClr val="3A4944"/>
-            </a:solidFill>
-          </a:ln>
-          <a:effectLst/>
-        </p:spPr>
-        <p:style>
-          <a:lnRef idx="1">
-            <a:schemeClr val="accent1"/>
-          </a:lnRef>
-          <a:fillRef idx="3">
-            <a:schemeClr val="accent1"/>
-          </a:fillRef>
-          <a:effectRef idx="0">
-            <a:schemeClr val="accent1"/>
-          </a:effectRef>
-          <a:fontRef idx="minor">
-            <a:schemeClr val="lt1"/>
-          </a:fontRef>
-        </p:style>
-        <p:txBody>
-          <a:bodyPr rtlCol="0" anchor="ctr"/>
-          <a:lstStyle/>
-          <a:p>
-            <a:pPr algn="ctr"/>
-          </a:p>
-        </p:txBody>
-      </p:sp>
-      <p:sp>
-        <p:nvSpPr>
-          <p:cNvPr id="24" name="TextBox 23"/>
+              <a:t>doi:10.64898/2026.06.03.729831</a:t>
+            </a:r>
+          </a:p>
+        </p:txBody>
+      </p:sp>
+      <p:sp>
+        <p:nvSpPr>
+          <p:cNvPr id="28" name="TextBox 27"/>
           <p:cNvSpPr txBox="1"/>
           <p:nvPr/>
         </p:nvSpPr>
         <p:spPr>
           <a:xfrm>
-            <a:off x="6601968" y="3456432"/>
-            <a:ext cx="4791456" cy="237744"/>
+            <a:off x="6601968" y="4773168"/>
+            <a:ext cx="4791456" cy="640080"/>
           </a:xfrm>
           <a:prstGeom prst="rect">
             <a:avLst/>
@@ -41036,27 +41126,27 @@
               </a:spcAft>
             </a:pPr>
             <a:r>
-              <a:rPr sz="1050" b="1">
+              <a:rPr sz="1350" b="0">
                 <a:solidFill>
-                  <a:srgbClr val="DEB577"/>
+                  <a:srgbClr val="F1EFE7"/>
                 </a:solidFill>
-                <a:latin typeface="IBM Plex Mono"/>
+                <a:latin typeface="IBM Plex Sans"/>
               </a:rPr>
-              <a:t>[ JOURNAL ] · PUBLISHED AFTER OUR CUTOFF</a:t>
-            </a:r>
-          </a:p>
-        </p:txBody>
-      </p:sp>
-      <p:sp>
-        <p:nvSpPr>
-          <p:cNvPr id="25" name="TextBox 24"/>
+              <a:t>Corpus frozen 2025-12-31  →  model cutoff January 2026  →  preprint 2026-06-07. The paper was published after both, by a group that never saw the engine.</a:t>
+            </a:r>
+          </a:p>
+        </p:txBody>
+      </p:sp>
+      <p:sp>
+        <p:nvSpPr>
+          <p:cNvPr id="29" name="TextBox 28"/>
           <p:cNvSpPr txBox="1"/>
           <p:nvPr/>
         </p:nvSpPr>
         <p:spPr>
           <a:xfrm>
-            <a:off x="6601968" y="3749039"/>
-            <a:ext cx="4791456" cy="731520"/>
+            <a:off x="566928" y="5998464"/>
+            <a:ext cx="11064240" cy="420624"/>
           </a:xfrm>
           <a:prstGeom prst="rect">
             <a:avLst/>
@@ -41081,193 +41171,13 @@
               </a:spcAft>
             </a:pPr>
             <a:r>
-              <a:rPr sz="1700" b="1">
-                <a:solidFill>
-                  <a:srgbClr val="F1EFE7"/>
-                </a:solidFill>
-                <a:latin typeface="IBM Plex Sans"/>
-              </a:rPr>
-              <a:t>[ Paper title — the independently published finding ]</a:t>
-            </a:r>
-          </a:p>
-        </p:txBody>
-      </p:sp>
-      <p:sp>
-        <p:nvSpPr>
-          <p:cNvPr id="26" name="TextBox 25"/>
-          <p:cNvSpPr txBox="1"/>
-          <p:nvPr/>
-        </p:nvSpPr>
-        <p:spPr>
-          <a:xfrm>
-            <a:off x="6601968" y="4590288"/>
-            <a:ext cx="4791456" cy="274320"/>
-          </a:xfrm>
-          <a:prstGeom prst="rect">
-            <a:avLst/>
-          </a:prstGeom>
-          <a:noFill/>
-        </p:spPr>
-        <p:txBody>
-          <a:bodyPr wrap="square" lIns="0" rIns="0" tIns="0" bIns="0" anchor="t">
-            <a:noAutofit/>
-          </a:bodyPr>
-          <a:lstStyle/>
-          <a:p>
-            <a:pPr algn="l">
-              <a:lnSpc>
-                <a:spcPct val="108000"/>
-              </a:lnSpc>
-              <a:spcBef>
-                <a:spcPts val="0"/>
-              </a:spcBef>
-              <a:spcAft>
-                <a:spcPts val="0"/>
-              </a:spcAft>
-            </a:pPr>
-            <a:r>
-              <a:rPr sz="1200" b="0">
-                <a:solidFill>
-                  <a:srgbClr val="AFB9B2"/>
-                </a:solidFill>
-                <a:latin typeface="IBM Plex Mono"/>
-              </a:rPr>
-              <a:t>[ AUTHORS ] · [ INSTITUTION ] · doi:[ DOI ]</a:t>
-            </a:r>
-          </a:p>
-        </p:txBody>
-      </p:sp>
-      <p:sp>
-        <p:nvSpPr>
-          <p:cNvPr id="27" name="TextBox 26"/>
-          <p:cNvSpPr txBox="1"/>
-          <p:nvPr/>
-        </p:nvSpPr>
-        <p:spPr>
-          <a:xfrm>
-            <a:off x="6601968" y="4919472"/>
-            <a:ext cx="4791456" cy="640080"/>
-          </a:xfrm>
-          <a:prstGeom prst="rect">
-            <a:avLst/>
-          </a:prstGeom>
-          <a:noFill/>
-        </p:spPr>
-        <p:txBody>
-          <a:bodyPr wrap="square" lIns="0" rIns="0" tIns="0" bIns="0" anchor="t">
-            <a:noAutofit/>
-          </a:bodyPr>
-          <a:lstStyle/>
-          <a:p>
-            <a:pPr algn="l">
-              <a:lnSpc>
-                <a:spcPct val="108000"/>
-              </a:lnSpc>
-              <a:spcBef>
-                <a:spcPts val="0"/>
-              </a:spcBef>
-              <a:spcAft>
-                <a:spcPts val="0"/>
-              </a:spcAft>
-            </a:pPr>
-            <a:r>
-              <a:rPr sz="1400" b="0">
-                <a:solidFill>
-                  <a:srgbClr val="F1EFE7"/>
-                </a:solidFill>
-                <a:latin typeface="IBM Plex Sans"/>
-              </a:rPr>
-              <a:t>[ The one sentence in this paper that matches our candidate ]</a:t>
-            </a:r>
-          </a:p>
-        </p:txBody>
-      </p:sp>
-      <p:sp>
-        <p:nvSpPr>
-          <p:cNvPr id="28" name="TextBox 27"/>
-          <p:cNvSpPr txBox="1"/>
-          <p:nvPr/>
-        </p:nvSpPr>
-        <p:spPr>
-          <a:xfrm>
-            <a:off x="566928" y="5888736"/>
-            <a:ext cx="11064240" cy="365760"/>
-          </a:xfrm>
-          <a:prstGeom prst="rect">
-            <a:avLst/>
-          </a:prstGeom>
-          <a:noFill/>
-        </p:spPr>
-        <p:txBody>
-          <a:bodyPr wrap="square" lIns="0" rIns="0" tIns="0" bIns="0" anchor="t">
-            <a:noAutofit/>
-          </a:bodyPr>
-          <a:lstStyle/>
-          <a:p>
-            <a:pPr algn="l">
-              <a:lnSpc>
-                <a:spcPct val="108000"/>
-              </a:lnSpc>
-              <a:spcBef>
-                <a:spcPts val="0"/>
-              </a:spcBef>
-              <a:spcAft>
-                <a:spcPts val="0"/>
-              </a:spcAft>
-            </a:pPr>
-            <a:r>
-              <a:rPr sz="1450" b="0">
+              <a:rPr sz="1250" b="0">
                 <a:solidFill>
                   <a:srgbClr val="DEB577"/>
                 </a:solidFill>
                 <a:latin typeface="IBM Plex Sans"/>
               </a:rPr>
-              <a:t>Sound numbers are not truth. What this shows is aim: a graph plus a strict gate pointed compute at real, findable science.</a:t>
-            </a:r>
-          </a:p>
-        </p:txBody>
-      </p:sp>
-      <p:sp>
-        <p:nvSpPr>
-          <p:cNvPr id="29" name="TextBox 28"/>
-          <p:cNvSpPr txBox="1"/>
-          <p:nvPr/>
-        </p:nvSpPr>
-        <p:spPr>
-          <a:xfrm>
-            <a:off x="548640" y="6181344"/>
-            <a:ext cx="11064240" cy="292608"/>
-          </a:xfrm>
-          <a:prstGeom prst="rect">
-            <a:avLst/>
-          </a:prstGeom>
-          <a:noFill/>
-        </p:spPr>
-        <p:txBody>
-          <a:bodyPr wrap="square" lIns="0" rIns="0" tIns="0" bIns="0" anchor="t">
-            <a:noAutofit/>
-          </a:bodyPr>
-          <a:lstStyle/>
-          <a:p>
-            <a:pPr algn="l">
-              <a:lnSpc>
-                <a:spcPct val="108000"/>
-              </a:lnSpc>
-              <a:spcBef>
-                <a:spcPts val="0"/>
-              </a:spcBef>
-              <a:spcAft>
-                <a:spcPts val="0"/>
-              </a:spcAft>
-            </a:pPr>
-            <a:r>
-              <a:rPr sz="1000" b="0">
-                <a:solidFill>
-                  <a:srgbClr val="AFB9B2"/>
-                </a:solidFill>
-                <a:latin typeface="IBM Plex Mono"/>
-              </a:rPr>
-              <a:t>RUN PENDING AUDIT · Bracketed values are placeholders. Do not present this slide until the run and the paper match are audited.</a:t>
+              <a:t>The other submission was wrong, and the floor did not catch it. FNTB passed the falsifier and a manual rank-based audit killed it at 0 of 25 (p = 1.0). The floor validates the statistic the agent reports; it does not re-derive the enrichment. The human gate did not run in this pass.</a:t>
             </a:r>
           </a:p>
         </p:txBody>
@@ -42094,7 +42004,7 @@
                 </a:solidFill>
                 <a:latin typeface="IBM Plex Sans"/>
               </a:rPr>
-              <a:t>Correct. It bounds the evidence, never pretraining memory. It shows aim and rigour, not clairvoyance.</a:t>
+              <a:t>Correct, so we ablate: the bare model with no corpus will not confirm the finding, and recalls a pre-cutoff control.</a:t>
             </a:r>
           </a:p>
         </p:txBody>
